--- a/weather_pipeline.pptx
+++ b/weather_pipeline.pptx
@@ -2359,7 +2359,7 @@
               <a:buNone/>
             </a:pPr>
             <a:r>
-              <a:rPr lang="en-US" sz="1300" dirty="0">
+              <a:rPr lang="en-US" sz="1300">
                 <a:solidFill>
                   <a:srgbClr val="8B949E"/>
                 </a:solidFill>
@@ -2367,7 +2367,18 @@
                 <a:ea typeface="Calibri" pitchFamily="34" charset="-122"/>
                 <a:cs typeface="Calibri" pitchFamily="34" charset="-120"/>
               </a:rPr>
-              <a:t>Our complete project repository, code logs, and interactive application screens are live on GitHub.</a:t>
+              <a:t>My </a:t>
+            </a:r>
+            <a:r>
+              <a:rPr lang="en-US" sz="1300" dirty="0">
+                <a:solidFill>
+                  <a:srgbClr val="8B949E"/>
+                </a:solidFill>
+                <a:latin typeface="Calibri" pitchFamily="34" charset="0"/>
+                <a:ea typeface="Calibri" pitchFamily="34" charset="-122"/>
+                <a:cs typeface="Calibri" pitchFamily="34" charset="-120"/>
+              </a:rPr>
+              <a:t>complete project repository, code logs, and interactive application screens are live on GitHub.</a:t>
             </a:r>
             <a:endParaRPr lang="en-US" sz="1300" dirty="0"/>
           </a:p>
@@ -3783,7 +3794,7 @@
                   <a:schemeClr val="bg1"/>
                 </a:solidFill>
               </a:rPr>
-              <a:t>Why We Chose This Dataset &amp; Problem</a:t>
+              <a:t>Why I Chose This Dataset &amp; Problem</a:t>
             </a:r>
             <a:endParaRPr lang="en-US" sz="2600" dirty="0">
               <a:solidFill>
@@ -3901,7 +3912,7 @@
                 <a:ea typeface="Calibri" pitchFamily="34" charset="-122"/>
                 <a:cs typeface="Calibri" pitchFamily="34" charset="-120"/>
               </a:rPr>
-              <a:t>1. </a:t>
+              <a:t>1. I</a:t>
             </a:r>
             <a:r>
               <a:rPr lang="en-US" sz="1600" dirty="0">
@@ -3909,7 +3920,7 @@
                   <a:schemeClr val="bg1"/>
                 </a:solidFill>
               </a:rPr>
-              <a:t>We chose the </a:t>
+              <a:t> chose the </a:t>
             </a:r>
             <a:r>
               <a:rPr lang="en-US" dirty="0">
@@ -4431,7 +4442,7 @@
                   <a:schemeClr val="bg1"/>
                 </a:solidFill>
               </a:rPr>
-              <a:t>What We Achieved: High-Scale Analytics</a:t>
+              <a:t>What I Achieved: High-Scale Analytics</a:t>
             </a:r>
             <a:endParaRPr lang="en-US" sz="2600" dirty="0">
               <a:solidFill>
@@ -4595,7 +4606,7 @@
                   <a:schemeClr val="bg1"/>
                 </a:solidFill>
               </a:rPr>
-              <a:t>, exceeding our 80% target reliability benchmark. </a:t>
+              <a:t>, exceeding my 80% target reliability benchmark. </a:t>
             </a:r>
           </a:p>
         </p:txBody>
@@ -4841,7 +4852,7 @@
                 <a:ea typeface="Calibri" pitchFamily="34" charset="-122"/>
                 <a:cs typeface="Calibri" pitchFamily="34" charset="-120"/>
               </a:rPr>
-              <a:t>Our study tracked multiple climate parameters (winds, temperature ranges, atmospheric air pressures).</a:t>
+              <a:t>My study tracked multiple climate parameters (winds, temperature ranges, atmospheric air pressures).</a:t>
             </a:r>
             <a:endParaRPr lang="en-US" sz="1300" dirty="0"/>
           </a:p>

--- a/weather_pipeline.pptx
+++ b/weather_pipeline.pptx
@@ -2328,9 +2328,8 @@
                 <a:ea typeface="Calibri" pitchFamily="34" charset="-122"/>
                 <a:cs typeface="Calibri" pitchFamily="34" charset="-120"/>
               </a:rPr>
-              <a:t>Questions &amp; Answers</a:t>
-            </a:r>
-            <a:endParaRPr lang="en-US" sz="4400" dirty="0"/>
+              <a:t>Thank You</a:t>
+            </a:r>
           </a:p>
         </p:txBody>
       </p:sp>

--- a/weather_pipeline.pptx
+++ b/weather_pipeline.pptx
@@ -5,7 +5,7 @@
     <p:sldMasterId id="2147483648" r:id="rId1"/>
   </p:sldMasterIdLst>
   <p:notesMasterIdLst>
-    <p:notesMasterId r:id="rId12"/>
+    <p:notesMasterId r:id="rId11"/>
   </p:notesMasterIdLst>
   <p:sldIdLst>
     <p:sldId id="256" r:id="rId2"/>
@@ -15,9 +15,8 @@
     <p:sldId id="259" r:id="rId6"/>
     <p:sldId id="260" r:id="rId7"/>
     <p:sldId id="261" r:id="rId8"/>
-    <p:sldId id="262" r:id="rId9"/>
-    <p:sldId id="265" r:id="rId10"/>
-    <p:sldId id="263" r:id="rId11"/>
+    <p:sldId id="265" r:id="rId9"/>
+    <p:sldId id="263" r:id="rId10"/>
   </p:sldIdLst>
   <p:sldSz cx="9144000" cy="5143500" type="screen16x9"/>
   <p:notesSz cx="5143500" cy="9144000"/>
@@ -844,90 +843,6 @@
 </p:notes>
 </file>
 
-<file path=ppt/notesSlides/notesSlide10.xml><?xml version="1.0" encoding="utf-8"?>
-<p:notes xmlns:a="http://schemas.openxmlformats.org/drawingml/2006/main" xmlns:r="http://schemas.openxmlformats.org/officeDocument/2006/relationships" xmlns:p="http://schemas.openxmlformats.org/presentationml/2006/main">
-  <p:cSld>
-    <p:spTree>
-      <p:nvGrpSpPr>
-        <p:cNvPr id="1" name=""/>
-        <p:cNvGrpSpPr/>
-        <p:nvPr/>
-      </p:nvGrpSpPr>
-      <p:grpSpPr>
-        <a:xfrm>
-          <a:off x="0" y="0"/>
-          <a:ext cx="0" cy="0"/>
-          <a:chOff x="0" y="0"/>
-          <a:chExt cx="0" cy="0"/>
-        </a:xfrm>
-      </p:grpSpPr>
-      <p:sp>
-        <p:nvSpPr>
-          <p:cNvPr id="2" name="Slide Image Placeholder 1"/>
-          <p:cNvSpPr>
-            <a:spLocks noGrp="1" noRot="1" noChangeAspect="1"/>
-          </p:cNvSpPr>
-          <p:nvPr>
-            <p:ph type="sldImg"/>
-          </p:nvPr>
-        </p:nvSpPr>
-        <p:spPr/>
-      </p:sp>
-      <p:sp>
-        <p:nvSpPr>
-          <p:cNvPr id="3" name="Notes Placeholder 2"/>
-          <p:cNvSpPr>
-            <a:spLocks noGrp="1"/>
-          </p:cNvSpPr>
-          <p:nvPr>
-            <p:ph type="body" idx="1"/>
-          </p:nvPr>
-        </p:nvSpPr>
-        <p:spPr/>
-        <p:txBody>
-          <a:bodyPr/>
-          <a:lstStyle/>
-          <a:p>
-            <a:endParaRPr lang="en-US" dirty="0"/>
-          </a:p>
-        </p:txBody>
-      </p:sp>
-      <p:sp>
-        <p:nvSpPr>
-          <p:cNvPr id="4" name="Slide Number Placeholder 3"/>
-          <p:cNvSpPr>
-            <a:spLocks noGrp="1"/>
-          </p:cNvSpPr>
-          <p:nvPr>
-            <p:ph type="sldNum" sz="quarter" idx="10"/>
-          </p:nvPr>
-        </p:nvSpPr>
-        <p:spPr/>
-        <p:txBody>
-          <a:bodyPr/>
-          <a:lstStyle/>
-          <a:p>
-            <a:fld id="{F7021451-1387-4CA6-816F-3879F97B5CBC}" type="slidenum">
-              <a:rPr lang="en-US"/>
-              <a:t>10</a:t>
-            </a:fld>
-            <a:endParaRPr lang="en-US"/>
-          </a:p>
-        </p:txBody>
-      </p:sp>
-    </p:spTree>
-    <p:extLst>
-      <p:ext uri="{BB962C8B-B14F-4D97-AF65-F5344CB8AC3E}">
-        <p14:creationId xmlns:p14="http://schemas.microsoft.com/office/powerpoint/2010/main" val="1024086991"/>
-      </p:ext>
-    </p:extLst>
-  </p:cSld>
-  <p:clrMapOvr>
-    <a:masterClrMapping/>
-  </p:clrMapOvr>
-</p:notes>
-</file>
-
 <file path=ppt/notesSlides/notesSlide2.xml><?xml version="1.0" encoding="utf-8"?>
 <p:notes xmlns:a="http://schemas.openxmlformats.org/drawingml/2006/main" xmlns:r="http://schemas.openxmlformats.org/officeDocument/2006/relationships" xmlns:p="http://schemas.openxmlformats.org/presentationml/2006/main">
   <p:cSld>
@@ -1461,90 +1376,6 @@
   <p:cSld>
     <p:spTree>
       <p:nvGrpSpPr>
-        <p:cNvPr id="1" name=""/>
-        <p:cNvGrpSpPr/>
-        <p:nvPr/>
-      </p:nvGrpSpPr>
-      <p:grpSpPr>
-        <a:xfrm>
-          <a:off x="0" y="0"/>
-          <a:ext cx="0" cy="0"/>
-          <a:chOff x="0" y="0"/>
-          <a:chExt cx="0" cy="0"/>
-        </a:xfrm>
-      </p:grpSpPr>
-      <p:sp>
-        <p:nvSpPr>
-          <p:cNvPr id="2" name="Slide Image Placeholder 1"/>
-          <p:cNvSpPr>
-            <a:spLocks noGrp="1" noRot="1" noChangeAspect="1"/>
-          </p:cNvSpPr>
-          <p:nvPr>
-            <p:ph type="sldImg"/>
-          </p:nvPr>
-        </p:nvSpPr>
-        <p:spPr/>
-      </p:sp>
-      <p:sp>
-        <p:nvSpPr>
-          <p:cNvPr id="3" name="Notes Placeholder 2"/>
-          <p:cNvSpPr>
-            <a:spLocks noGrp="1"/>
-          </p:cNvSpPr>
-          <p:nvPr>
-            <p:ph type="body" idx="1"/>
-          </p:nvPr>
-        </p:nvSpPr>
-        <p:spPr/>
-        <p:txBody>
-          <a:bodyPr/>
-          <a:lstStyle/>
-          <a:p>
-            <a:endParaRPr lang="en-US" dirty="0"/>
-          </a:p>
-        </p:txBody>
-      </p:sp>
-      <p:sp>
-        <p:nvSpPr>
-          <p:cNvPr id="4" name="Slide Number Placeholder 3"/>
-          <p:cNvSpPr>
-            <a:spLocks noGrp="1"/>
-          </p:cNvSpPr>
-          <p:nvPr>
-            <p:ph type="sldNum" sz="quarter" idx="10"/>
-          </p:nvPr>
-        </p:nvSpPr>
-        <p:spPr/>
-        <p:txBody>
-          <a:bodyPr/>
-          <a:lstStyle/>
-          <a:p>
-            <a:fld id="{F7021451-1387-4CA6-816F-3879F97B5CBC}" type="slidenum">
-              <a:rPr lang="en-US"/>
-              <a:t>8</a:t>
-            </a:fld>
-            <a:endParaRPr lang="en-US"/>
-          </a:p>
-        </p:txBody>
-      </p:sp>
-    </p:spTree>
-    <p:extLst>
-      <p:ext uri="{BB962C8B-B14F-4D97-AF65-F5344CB8AC3E}">
-        <p14:creationId xmlns:p14="http://schemas.microsoft.com/office/powerpoint/2010/main" val="1024086991"/>
-      </p:ext>
-    </p:extLst>
-  </p:cSld>
-  <p:clrMapOvr>
-    <a:masterClrMapping/>
-  </p:clrMapOvr>
-</p:notes>
-</file>
-
-<file path=ppt/notesSlides/notesSlide9.xml><?xml version="1.0" encoding="utf-8"?>
-<p:notes xmlns:a="http://schemas.openxmlformats.org/drawingml/2006/main" xmlns:r="http://schemas.openxmlformats.org/officeDocument/2006/relationships" xmlns:p="http://schemas.openxmlformats.org/presentationml/2006/main">
-  <p:cSld>
-    <p:spTree>
-      <p:nvGrpSpPr>
         <p:cNvPr id="1" name="">
           <a:extLst>
             <a:ext uri="{FF2B5EF4-FFF2-40B4-BE49-F238E27FC236}">
@@ -1629,7 +1460,7 @@
           <a:p>
             <a:fld id="{F7021451-1387-4CA6-816F-3879F97B5CBC}" type="slidenum">
               <a:rPr lang="en-US"/>
-              <a:t>9</a:t>
+              <a:t>8</a:t>
             </a:fld>
             <a:endParaRPr lang="en-US"/>
           </a:p>
@@ -1639,6 +1470,90 @@
     <p:extLst>
       <p:ext uri="{BB962C8B-B14F-4D97-AF65-F5344CB8AC3E}">
         <p14:creationId xmlns:p14="http://schemas.microsoft.com/office/powerpoint/2010/main" val="685650990"/>
+      </p:ext>
+    </p:extLst>
+  </p:cSld>
+  <p:clrMapOvr>
+    <a:masterClrMapping/>
+  </p:clrMapOvr>
+</p:notes>
+</file>
+
+<file path=ppt/notesSlides/notesSlide9.xml><?xml version="1.0" encoding="utf-8"?>
+<p:notes xmlns:a="http://schemas.openxmlformats.org/drawingml/2006/main" xmlns:r="http://schemas.openxmlformats.org/officeDocument/2006/relationships" xmlns:p="http://schemas.openxmlformats.org/presentationml/2006/main">
+  <p:cSld>
+    <p:spTree>
+      <p:nvGrpSpPr>
+        <p:cNvPr id="1" name=""/>
+        <p:cNvGrpSpPr/>
+        <p:nvPr/>
+      </p:nvGrpSpPr>
+      <p:grpSpPr>
+        <a:xfrm>
+          <a:off x="0" y="0"/>
+          <a:ext cx="0" cy="0"/>
+          <a:chOff x="0" y="0"/>
+          <a:chExt cx="0" cy="0"/>
+        </a:xfrm>
+      </p:grpSpPr>
+      <p:sp>
+        <p:nvSpPr>
+          <p:cNvPr id="2" name="Slide Image Placeholder 1"/>
+          <p:cNvSpPr>
+            <a:spLocks noGrp="1" noRot="1" noChangeAspect="1"/>
+          </p:cNvSpPr>
+          <p:nvPr>
+            <p:ph type="sldImg"/>
+          </p:nvPr>
+        </p:nvSpPr>
+        <p:spPr/>
+      </p:sp>
+      <p:sp>
+        <p:nvSpPr>
+          <p:cNvPr id="3" name="Notes Placeholder 2"/>
+          <p:cNvSpPr>
+            <a:spLocks noGrp="1"/>
+          </p:cNvSpPr>
+          <p:nvPr>
+            <p:ph type="body" idx="1"/>
+          </p:nvPr>
+        </p:nvSpPr>
+        <p:spPr/>
+        <p:txBody>
+          <a:bodyPr/>
+          <a:lstStyle/>
+          <a:p>
+            <a:endParaRPr lang="en-US" dirty="0"/>
+          </a:p>
+        </p:txBody>
+      </p:sp>
+      <p:sp>
+        <p:nvSpPr>
+          <p:cNvPr id="4" name="Slide Number Placeholder 3"/>
+          <p:cNvSpPr>
+            <a:spLocks noGrp="1"/>
+          </p:cNvSpPr>
+          <p:nvPr>
+            <p:ph type="sldNum" sz="quarter" idx="10"/>
+          </p:nvPr>
+        </p:nvSpPr>
+        <p:spPr/>
+        <p:txBody>
+          <a:bodyPr/>
+          <a:lstStyle/>
+          <a:p>
+            <a:fld id="{F7021451-1387-4CA6-816F-3879F97B5CBC}" type="slidenum">
+              <a:rPr lang="en-US"/>
+              <a:t>9</a:t>
+            </a:fld>
+            <a:endParaRPr lang="en-US"/>
+          </a:p>
+        </p:txBody>
+      </p:sp>
+    </p:spTree>
+    <p:extLst>
+      <p:ext uri="{BB962C8B-B14F-4D97-AF65-F5344CB8AC3E}">
+        <p14:creationId xmlns:p14="http://schemas.microsoft.com/office/powerpoint/2010/main" val="1024086991"/>
       </p:ext>
     </p:extLst>
   </p:cSld>
@@ -2218,243 +2133,6 @@
 </p:sld>
 </file>
 
-<file path=ppt/slides/slide10.xml><?xml version="1.0" encoding="utf-8"?>
-<p:sld xmlns:a="http://schemas.openxmlformats.org/drawingml/2006/main" xmlns:r="http://schemas.openxmlformats.org/officeDocument/2006/relationships" xmlns:p="http://schemas.openxmlformats.org/presentationml/2006/main">
-  <p:cSld name="Slide 8">
-    <p:bg>
-      <p:bgPr>
-        <a:solidFill>
-          <a:srgbClr val="0D1117"/>
-        </a:solidFill>
-        <a:effectLst/>
-      </p:bgPr>
-    </p:bg>
-    <p:spTree>
-      <p:nvGrpSpPr>
-        <p:cNvPr id="1" name=""/>
-        <p:cNvGrpSpPr/>
-        <p:nvPr/>
-      </p:nvGrpSpPr>
-      <p:grpSpPr>
-        <a:xfrm>
-          <a:off x="0" y="0"/>
-          <a:ext cx="0" cy="0"/>
-          <a:chOff x="0" y="0"/>
-          <a:chExt cx="0" cy="0"/>
-        </a:xfrm>
-      </p:grpSpPr>
-      <p:sp>
-        <p:nvSpPr>
-          <p:cNvPr id="2" name="Shape 0"/>
-          <p:cNvSpPr/>
-          <p:nvPr/>
-        </p:nvSpPr>
-        <p:spPr>
-          <a:xfrm>
-            <a:off x="2743200" y="-1371600"/>
-            <a:ext cx="3657600" cy="3657600"/>
-          </a:xfrm>
-          <a:prstGeom prst="ellipse">
-            <a:avLst/>
-          </a:prstGeom>
-          <a:solidFill>
-            <a:srgbClr val="003D30">
-              <a:alpha val="50000"/>
-            </a:srgbClr>
-          </a:solidFill>
-          <a:ln w="12700">
-            <a:solidFill>
-              <a:srgbClr val="003D30"/>
-            </a:solidFill>
-            <a:prstDash val="solid"/>
-          </a:ln>
-        </p:spPr>
-      </p:sp>
-      <p:sp>
-        <p:nvSpPr>
-          <p:cNvPr id="3" name="Shape 1"/>
-          <p:cNvSpPr/>
-          <p:nvPr/>
-        </p:nvSpPr>
-        <p:spPr>
-          <a:xfrm>
-            <a:off x="3931920" y="1463040"/>
-            <a:ext cx="1280160" cy="54864"/>
-          </a:xfrm>
-          <a:prstGeom prst="rect">
-            <a:avLst/>
-          </a:prstGeom>
-          <a:solidFill>
-            <a:srgbClr val="00C896"/>
-          </a:solidFill>
-          <a:ln w="12700">
-            <a:solidFill>
-              <a:srgbClr val="00C896"/>
-            </a:solidFill>
-            <a:prstDash val="solid"/>
-          </a:ln>
-        </p:spPr>
-      </p:sp>
-      <p:sp>
-        <p:nvSpPr>
-          <p:cNvPr id="4" name="Text 2"/>
-          <p:cNvSpPr/>
-          <p:nvPr/>
-        </p:nvSpPr>
-        <p:spPr>
-          <a:xfrm>
-            <a:off x="914400" y="1691640"/>
-            <a:ext cx="7315200" cy="822960"/>
-          </a:xfrm>
-          <a:prstGeom prst="rect">
-            <a:avLst/>
-          </a:prstGeom>
-          <a:noFill/>
-          <a:ln/>
-        </p:spPr>
-        <p:txBody>
-          <a:bodyPr wrap="square" rtlCol="0" anchor="ctr"/>
-          <a:lstStyle/>
-          <a:p>
-            <a:pPr marL="0" indent="0" algn="ctr">
-              <a:buNone/>
-            </a:pPr>
-            <a:r>
-              <a:rPr lang="en-US" sz="4400" b="1" dirty="0">
-                <a:solidFill>
-                  <a:srgbClr val="FFFFFF"/>
-                </a:solidFill>
-                <a:latin typeface="Calibri" pitchFamily="34" charset="0"/>
-                <a:ea typeface="Calibri" pitchFamily="34" charset="-122"/>
-                <a:cs typeface="Calibri" pitchFamily="34" charset="-120"/>
-              </a:rPr>
-              <a:t>Thank You</a:t>
-            </a:r>
-          </a:p>
-        </p:txBody>
-      </p:sp>
-      <p:sp>
-        <p:nvSpPr>
-          <p:cNvPr id="5" name="Text 3"/>
-          <p:cNvSpPr/>
-          <p:nvPr/>
-        </p:nvSpPr>
-        <p:spPr>
-          <a:xfrm>
-            <a:off x="1371600" y="2651760"/>
-            <a:ext cx="6400800" cy="548640"/>
-          </a:xfrm>
-          <a:prstGeom prst="rect">
-            <a:avLst/>
-          </a:prstGeom>
-          <a:noFill/>
-          <a:ln/>
-        </p:spPr>
-        <p:txBody>
-          <a:bodyPr wrap="square" rtlCol="0" anchor="ctr"/>
-          <a:lstStyle/>
-          <a:p>
-            <a:pPr marL="0" indent="0" algn="ctr">
-              <a:buNone/>
-            </a:pPr>
-            <a:r>
-              <a:rPr lang="en-US" sz="1300">
-                <a:solidFill>
-                  <a:srgbClr val="8B949E"/>
-                </a:solidFill>
-                <a:latin typeface="Calibri" pitchFamily="34" charset="0"/>
-                <a:ea typeface="Calibri" pitchFamily="34" charset="-122"/>
-                <a:cs typeface="Calibri" pitchFamily="34" charset="-120"/>
-              </a:rPr>
-              <a:t>My </a:t>
-            </a:r>
-            <a:r>
-              <a:rPr lang="en-US" sz="1300" dirty="0">
-                <a:solidFill>
-                  <a:srgbClr val="8B949E"/>
-                </a:solidFill>
-                <a:latin typeface="Calibri" pitchFamily="34" charset="0"/>
-                <a:ea typeface="Calibri" pitchFamily="34" charset="-122"/>
-                <a:cs typeface="Calibri" pitchFamily="34" charset="-120"/>
-              </a:rPr>
-              <a:t>complete project repository, code logs, and interactive application screens are live on GitHub.</a:t>
-            </a:r>
-            <a:endParaRPr lang="en-US" sz="1300" dirty="0"/>
-          </a:p>
-        </p:txBody>
-      </p:sp>
-      <p:sp>
-        <p:nvSpPr>
-          <p:cNvPr id="6" name="Shape 4"/>
-          <p:cNvSpPr/>
-          <p:nvPr/>
-        </p:nvSpPr>
-        <p:spPr>
-          <a:xfrm>
-            <a:off x="1828800" y="3429000"/>
-            <a:ext cx="5486400" cy="640080"/>
-          </a:xfrm>
-          <a:prstGeom prst="rect">
-            <a:avLst/>
-          </a:prstGeom>
-          <a:solidFill>
-            <a:srgbClr val="161B22"/>
-          </a:solidFill>
-          <a:ln w="12700">
-            <a:solidFill>
-              <a:srgbClr val="21262D"/>
-            </a:solidFill>
-            <a:prstDash val="solid"/>
-          </a:ln>
-        </p:spPr>
-      </p:sp>
-      <p:sp>
-        <p:nvSpPr>
-          <p:cNvPr id="7" name="Text 5"/>
-          <p:cNvSpPr/>
-          <p:nvPr/>
-        </p:nvSpPr>
-        <p:spPr>
-          <a:xfrm>
-            <a:off x="1920240" y="3520440"/>
-            <a:ext cx="5303520" cy="457200"/>
-          </a:xfrm>
-          <a:prstGeom prst="rect">
-            <a:avLst/>
-          </a:prstGeom>
-          <a:noFill/>
-          <a:ln/>
-        </p:spPr>
-        <p:txBody>
-          <a:bodyPr wrap="square" rtlCol="0" anchor="ctr"/>
-          <a:lstStyle/>
-          <a:p>
-            <a:pPr marL="0" indent="0" algn="ctr">
-              <a:buNone/>
-            </a:pPr>
-            <a:r>
-              <a:rPr lang="en-US" sz="1100" dirty="0">
-                <a:solidFill>
-                  <a:srgbClr val="00B4D8"/>
-                </a:solidFill>
-                <a:latin typeface="Calibri" pitchFamily="34" charset="0"/>
-                <a:ea typeface="Calibri" pitchFamily="34" charset="-122"/>
-                <a:cs typeface="Calibri" pitchFamily="34" charset="-120"/>
-              </a:rPr>
-              <a:t>🐙  github.com/alexxksh/Big-Data-Weather-Analysis      |      PySpark | Streamlit | Tableau</a:t>
-            </a:r>
-            <a:endParaRPr lang="en-US" sz="1100" dirty="0"/>
-          </a:p>
-        </p:txBody>
-      </p:sp>
-    </p:spTree>
-  </p:cSld>
-  <p:clrMapOvr>
-    <a:masterClrMapping/>
-  </p:clrMapOvr>
-</p:sld>
-</file>
-
 <file path=ppt/slides/slide2.xml><?xml version="1.0" encoding="utf-8"?>
 <p:sld xmlns:a="http://schemas.openxmlformats.org/drawingml/2006/main" xmlns:r="http://schemas.openxmlformats.org/officeDocument/2006/relationships" xmlns:p="http://schemas.openxmlformats.org/presentationml/2006/main">
   <p:cSld name="Slide 2">
@@ -5448,691 +5126,6 @@
 
 <file path=ppt/slides/slide8.xml><?xml version="1.0" encoding="utf-8"?>
 <p:sld xmlns:a="http://schemas.openxmlformats.org/drawingml/2006/main" xmlns:r="http://schemas.openxmlformats.org/officeDocument/2006/relationships" xmlns:p="http://schemas.openxmlformats.org/presentationml/2006/main">
-  <p:cSld name="Slide 7">
-    <p:bg>
-      <p:bgPr>
-        <a:solidFill>
-          <a:srgbClr val="0D1117"/>
-        </a:solidFill>
-        <a:effectLst/>
-      </p:bgPr>
-    </p:bg>
-    <p:spTree>
-      <p:nvGrpSpPr>
-        <p:cNvPr id="1" name=""/>
-        <p:cNvGrpSpPr/>
-        <p:nvPr/>
-      </p:nvGrpSpPr>
-      <p:grpSpPr>
-        <a:xfrm>
-          <a:off x="0" y="0"/>
-          <a:ext cx="0" cy="0"/>
-          <a:chOff x="0" y="0"/>
-          <a:chExt cx="0" cy="0"/>
-        </a:xfrm>
-      </p:grpSpPr>
-      <p:sp>
-        <p:nvSpPr>
-          <p:cNvPr id="2" name="Shape 0"/>
-          <p:cNvSpPr/>
-          <p:nvPr/>
-        </p:nvSpPr>
-        <p:spPr>
-          <a:xfrm>
-            <a:off x="457200" y="320040"/>
-            <a:ext cx="45720" cy="411480"/>
-          </a:xfrm>
-          <a:prstGeom prst="rect">
-            <a:avLst/>
-          </a:prstGeom>
-          <a:solidFill>
-            <a:srgbClr val="00C896"/>
-          </a:solidFill>
-          <a:ln w="12700">
-            <a:solidFill>
-              <a:srgbClr val="00C896"/>
-            </a:solidFill>
-            <a:prstDash val="solid"/>
-          </a:ln>
-        </p:spPr>
-      </p:sp>
-      <p:sp>
-        <p:nvSpPr>
-          <p:cNvPr id="3" name="Text 1"/>
-          <p:cNvSpPr/>
-          <p:nvPr/>
-        </p:nvSpPr>
-        <p:spPr>
-          <a:xfrm>
-            <a:off x="594360" y="274320"/>
-            <a:ext cx="7315200" cy="502920"/>
-          </a:xfrm>
-          <a:prstGeom prst="rect">
-            <a:avLst/>
-          </a:prstGeom>
-          <a:noFill/>
-          <a:ln/>
-        </p:spPr>
-        <p:txBody>
-          <a:bodyPr wrap="square" lIns="0" tIns="0" rIns="0" bIns="0" rtlCol="0" anchor="ctr"/>
-          <a:lstStyle/>
-          <a:p>
-            <a:pPr marL="0" indent="0">
-              <a:buNone/>
-            </a:pPr>
-            <a:r>
-              <a:rPr lang="en-US" sz="2600" b="1" dirty="0">
-                <a:solidFill>
-                  <a:srgbClr val="FFFFFF"/>
-                </a:solidFill>
-                <a:latin typeface="Calibri" pitchFamily="34" charset="0"/>
-                <a:ea typeface="Calibri" pitchFamily="34" charset="-122"/>
-                <a:cs typeface="Calibri" pitchFamily="34" charset="-120"/>
-              </a:rPr>
-              <a:t>Interactive Pipeline Deliverables</a:t>
-            </a:r>
-            <a:endParaRPr lang="en-US" sz="2600" dirty="0"/>
-          </a:p>
-        </p:txBody>
-      </p:sp>
-      <p:sp>
-        <p:nvSpPr>
-          <p:cNvPr id="4" name="Shape 2"/>
-          <p:cNvSpPr/>
-          <p:nvPr/>
-        </p:nvSpPr>
-        <p:spPr>
-          <a:xfrm>
-            <a:off x="320040" y="1005840"/>
-            <a:ext cx="2651760" cy="3840480"/>
-          </a:xfrm>
-          <a:prstGeom prst="rect">
-            <a:avLst/>
-          </a:prstGeom>
-          <a:solidFill>
-            <a:srgbClr val="161B22"/>
-          </a:solidFill>
-          <a:ln w="12700">
-            <a:solidFill>
-              <a:srgbClr val="21262D"/>
-            </a:solidFill>
-            <a:prstDash val="solid"/>
-          </a:ln>
-          <a:effectLst>
-            <a:outerShdw blurRad="101600" dist="25400" dir="8100000" algn="bl" rotWithShape="0">
-              <a:srgbClr val="000000">
-                <a:alpha val="35000"/>
-              </a:srgbClr>
-            </a:outerShdw>
-          </a:effectLst>
-        </p:spPr>
-      </p:sp>
-      <p:sp>
-        <p:nvSpPr>
-          <p:cNvPr id="5" name="Shape 3"/>
-          <p:cNvSpPr/>
-          <p:nvPr/>
-        </p:nvSpPr>
-        <p:spPr>
-          <a:xfrm>
-            <a:off x="320040" y="1005840"/>
-            <a:ext cx="2651760" cy="73152"/>
-          </a:xfrm>
-          <a:prstGeom prst="rect">
-            <a:avLst/>
-          </a:prstGeom>
-          <a:solidFill>
-            <a:srgbClr val="00C896"/>
-          </a:solidFill>
-          <a:ln w="12700">
-            <a:solidFill>
-              <a:srgbClr val="00C896"/>
-            </a:solidFill>
-            <a:prstDash val="solid"/>
-          </a:ln>
-        </p:spPr>
-      </p:sp>
-      <p:sp>
-        <p:nvSpPr>
-          <p:cNvPr id="6" name="Shape 4"/>
-          <p:cNvSpPr/>
-          <p:nvPr/>
-        </p:nvSpPr>
-        <p:spPr>
-          <a:xfrm>
-            <a:off x="411480" y="1143000"/>
-            <a:ext cx="2468880" cy="1554480"/>
-          </a:xfrm>
-          <a:prstGeom prst="rect">
-            <a:avLst/>
-          </a:prstGeom>
-          <a:solidFill>
-            <a:srgbClr val="1C2128"/>
-          </a:solidFill>
-          <a:ln w="12700">
-            <a:solidFill>
-              <a:srgbClr val="21262D"/>
-            </a:solidFill>
-            <a:prstDash val="solid"/>
-          </a:ln>
-        </p:spPr>
-      </p:sp>
-      <p:sp>
-        <p:nvSpPr>
-          <p:cNvPr id="7" name="Text 5"/>
-          <p:cNvSpPr/>
-          <p:nvPr/>
-        </p:nvSpPr>
-        <p:spPr>
-          <a:xfrm>
-            <a:off x="411480" y="1280160"/>
-            <a:ext cx="2468880" cy="1097280"/>
-          </a:xfrm>
-          <a:prstGeom prst="rect">
-            <a:avLst/>
-          </a:prstGeom>
-          <a:noFill/>
-          <a:ln/>
-        </p:spPr>
-        <p:txBody>
-          <a:bodyPr wrap="square" rtlCol="0" anchor="ctr"/>
-          <a:lstStyle/>
-          <a:p>
-            <a:pPr marL="0" indent="0" algn="ctr">
-              <a:buNone/>
-            </a:pPr>
-            <a:r>
-              <a:rPr lang="en-US" sz="4800" dirty="0">
-                <a:solidFill>
-                  <a:srgbClr val="000000"/>
-                </a:solidFill>
-              </a:rPr>
-              <a:t>💻</a:t>
-            </a:r>
-            <a:endParaRPr lang="en-US" sz="4800" dirty="0"/>
-          </a:p>
-        </p:txBody>
-      </p:sp>
-      <p:sp>
-        <p:nvSpPr>
-          <p:cNvPr id="8" name="Text 6"/>
-          <p:cNvSpPr/>
-          <p:nvPr/>
-        </p:nvSpPr>
-        <p:spPr>
-          <a:xfrm>
-            <a:off x="457200" y="2834640"/>
-            <a:ext cx="2377440" cy="411480"/>
-          </a:xfrm>
-          <a:prstGeom prst="rect">
-            <a:avLst/>
-          </a:prstGeom>
-          <a:noFill/>
-          <a:ln/>
-        </p:spPr>
-        <p:txBody>
-          <a:bodyPr wrap="square" lIns="0" tIns="0" rIns="0" bIns="0" rtlCol="0" anchor="ctr"/>
-          <a:lstStyle/>
-          <a:p>
-            <a:pPr marL="0" indent="0" algn="ctr">
-              <a:buNone/>
-            </a:pPr>
-            <a:r>
-              <a:rPr lang="en-US" sz="1300" b="1" dirty="0">
-                <a:solidFill>
-                  <a:srgbClr val="FFFFFF"/>
-                </a:solidFill>
-                <a:latin typeface="Calibri" pitchFamily="34" charset="0"/>
-                <a:ea typeface="Calibri" pitchFamily="34" charset="-122"/>
-                <a:cs typeface="Calibri" pitchFamily="34" charset="-120"/>
-              </a:rPr>
-              <a:t>Phase 1-2: EDA &amp; ETL</a:t>
-            </a:r>
-            <a:endParaRPr lang="en-US" sz="1300" dirty="0"/>
-          </a:p>
-        </p:txBody>
-      </p:sp>
-      <p:sp>
-        <p:nvSpPr>
-          <p:cNvPr id="9" name="Text 7"/>
-          <p:cNvSpPr/>
-          <p:nvPr/>
-        </p:nvSpPr>
-        <p:spPr>
-          <a:xfrm>
-            <a:off x="457200" y="3291840"/>
-            <a:ext cx="2377440" cy="1280160"/>
-          </a:xfrm>
-          <a:prstGeom prst="rect">
-            <a:avLst/>
-          </a:prstGeom>
-          <a:noFill/>
-          <a:ln/>
-        </p:spPr>
-        <p:txBody>
-          <a:bodyPr wrap="square" lIns="0" tIns="0" rIns="0" bIns="0" rtlCol="0" anchor="ctr"/>
-          <a:lstStyle/>
-          <a:p>
-            <a:pPr marL="0" indent="0" algn="ctr">
-              <a:buNone/>
-            </a:pPr>
-            <a:r>
-              <a:rPr lang="en-US" sz="1100" dirty="0">
-                <a:solidFill>
-                  <a:srgbClr val="8B949E"/>
-                </a:solidFill>
-                <a:latin typeface="Calibri" pitchFamily="34" charset="0"/>
-                <a:ea typeface="Calibri" pitchFamily="34" charset="-122"/>
-                <a:cs typeface="Calibri" pitchFamily="34" charset="-120"/>
-              </a:rPr>
-              <a:t>Cleaned structured code files documenting model pre-processing steps.</a:t>
-            </a:r>
-            <a:endParaRPr lang="en-US" sz="1100" dirty="0"/>
-          </a:p>
-        </p:txBody>
-      </p:sp>
-      <p:sp>
-        <p:nvSpPr>
-          <p:cNvPr id="10" name="Shape 8"/>
-          <p:cNvSpPr/>
-          <p:nvPr/>
-        </p:nvSpPr>
-        <p:spPr>
-          <a:xfrm>
-            <a:off x="3200400" y="1005840"/>
-            <a:ext cx="2651760" cy="3840480"/>
-          </a:xfrm>
-          <a:prstGeom prst="rect">
-            <a:avLst/>
-          </a:prstGeom>
-          <a:solidFill>
-            <a:srgbClr val="161B22"/>
-          </a:solidFill>
-          <a:ln w="12700">
-            <a:solidFill>
-              <a:srgbClr val="21262D"/>
-            </a:solidFill>
-            <a:prstDash val="solid"/>
-          </a:ln>
-          <a:effectLst>
-            <a:outerShdw blurRad="101600" dist="25400" dir="8100000" algn="bl" rotWithShape="0">
-              <a:srgbClr val="000000">
-                <a:alpha val="35000"/>
-              </a:srgbClr>
-            </a:outerShdw>
-          </a:effectLst>
-        </p:spPr>
-      </p:sp>
-      <p:sp>
-        <p:nvSpPr>
-          <p:cNvPr id="11" name="Shape 9"/>
-          <p:cNvSpPr/>
-          <p:nvPr/>
-        </p:nvSpPr>
-        <p:spPr>
-          <a:xfrm>
-            <a:off x="3200400" y="1005840"/>
-            <a:ext cx="2651760" cy="73152"/>
-          </a:xfrm>
-          <a:prstGeom prst="rect">
-            <a:avLst/>
-          </a:prstGeom>
-          <a:solidFill>
-            <a:srgbClr val="00C896"/>
-          </a:solidFill>
-          <a:ln w="12700">
-            <a:solidFill>
-              <a:srgbClr val="00C896"/>
-            </a:solidFill>
-            <a:prstDash val="solid"/>
-          </a:ln>
-        </p:spPr>
-      </p:sp>
-      <p:sp>
-        <p:nvSpPr>
-          <p:cNvPr id="12" name="Shape 10"/>
-          <p:cNvSpPr/>
-          <p:nvPr/>
-        </p:nvSpPr>
-        <p:spPr>
-          <a:xfrm>
-            <a:off x="3291840" y="1143000"/>
-            <a:ext cx="2468880" cy="1554480"/>
-          </a:xfrm>
-          <a:prstGeom prst="rect">
-            <a:avLst/>
-          </a:prstGeom>
-          <a:solidFill>
-            <a:srgbClr val="1C2128"/>
-          </a:solidFill>
-          <a:ln w="12700">
-            <a:solidFill>
-              <a:srgbClr val="21262D"/>
-            </a:solidFill>
-            <a:prstDash val="solid"/>
-          </a:ln>
-        </p:spPr>
-      </p:sp>
-      <p:sp>
-        <p:nvSpPr>
-          <p:cNvPr id="13" name="Text 11"/>
-          <p:cNvSpPr/>
-          <p:nvPr/>
-        </p:nvSpPr>
-        <p:spPr>
-          <a:xfrm>
-            <a:off x="3291840" y="1280160"/>
-            <a:ext cx="2468880" cy="1097280"/>
-          </a:xfrm>
-          <a:prstGeom prst="rect">
-            <a:avLst/>
-          </a:prstGeom>
-          <a:noFill/>
-          <a:ln/>
-        </p:spPr>
-        <p:txBody>
-          <a:bodyPr wrap="square" rtlCol="0" anchor="ctr"/>
-          <a:lstStyle/>
-          <a:p>
-            <a:pPr marL="0" indent="0" algn="ctr">
-              <a:buNone/>
-            </a:pPr>
-            <a:r>
-              <a:rPr lang="en-US" sz="4800" dirty="0">
-                <a:solidFill>
-                  <a:srgbClr val="000000"/>
-                </a:solidFill>
-              </a:rPr>
-              <a:t>🤖</a:t>
-            </a:r>
-            <a:endParaRPr lang="en-US" sz="4800" dirty="0"/>
-          </a:p>
-        </p:txBody>
-      </p:sp>
-      <p:sp>
-        <p:nvSpPr>
-          <p:cNvPr id="14" name="Text 12"/>
-          <p:cNvSpPr/>
-          <p:nvPr/>
-        </p:nvSpPr>
-        <p:spPr>
-          <a:xfrm>
-            <a:off x="3337560" y="2834640"/>
-            <a:ext cx="2377440" cy="411480"/>
-          </a:xfrm>
-          <a:prstGeom prst="rect">
-            <a:avLst/>
-          </a:prstGeom>
-          <a:noFill/>
-          <a:ln/>
-        </p:spPr>
-        <p:txBody>
-          <a:bodyPr wrap="square" lIns="0" tIns="0" rIns="0" bIns="0" rtlCol="0" anchor="ctr"/>
-          <a:lstStyle/>
-          <a:p>
-            <a:pPr marL="0" indent="0" algn="ctr">
-              <a:buNone/>
-            </a:pPr>
-            <a:r>
-              <a:rPr lang="en-US" sz="1300" b="1" dirty="0">
-                <a:solidFill>
-                  <a:srgbClr val="FFFFFF"/>
-                </a:solidFill>
-                <a:latin typeface="Calibri" pitchFamily="34" charset="0"/>
-                <a:ea typeface="Calibri" pitchFamily="34" charset="-122"/>
-                <a:cs typeface="Calibri" pitchFamily="34" charset="-120"/>
-              </a:rPr>
-              <a:t>Phase 3: PySpark Model</a:t>
-            </a:r>
-            <a:endParaRPr lang="en-US" sz="1300" dirty="0"/>
-          </a:p>
-        </p:txBody>
-      </p:sp>
-      <p:sp>
-        <p:nvSpPr>
-          <p:cNvPr id="15" name="Text 13"/>
-          <p:cNvSpPr/>
-          <p:nvPr/>
-        </p:nvSpPr>
-        <p:spPr>
-          <a:xfrm>
-            <a:off x="3337560" y="3291840"/>
-            <a:ext cx="2377440" cy="1280160"/>
-          </a:xfrm>
-          <a:prstGeom prst="rect">
-            <a:avLst/>
-          </a:prstGeom>
-          <a:noFill/>
-          <a:ln/>
-        </p:spPr>
-        <p:txBody>
-          <a:bodyPr wrap="square" lIns="0" tIns="0" rIns="0" bIns="0" rtlCol="0" anchor="ctr"/>
-          <a:lstStyle/>
-          <a:p>
-            <a:pPr marL="0" indent="0" algn="ctr">
-              <a:buNone/>
-            </a:pPr>
-            <a:r>
-              <a:rPr lang="en-US" sz="1100" dirty="0">
-                <a:solidFill>
-                  <a:srgbClr val="8B949E"/>
-                </a:solidFill>
-                <a:latin typeface="Calibri" pitchFamily="34" charset="0"/>
-                <a:ea typeface="Calibri" pitchFamily="34" charset="-122"/>
-                <a:cs typeface="Calibri" pitchFamily="34" charset="-120"/>
-              </a:rPr>
-              <a:t>Robust machine learning model targeting thermodynamic patterns.</a:t>
-            </a:r>
-            <a:endParaRPr lang="en-US" sz="1100" dirty="0"/>
-          </a:p>
-        </p:txBody>
-      </p:sp>
-      <p:sp>
-        <p:nvSpPr>
-          <p:cNvPr id="16" name="Shape 14"/>
-          <p:cNvSpPr/>
-          <p:nvPr/>
-        </p:nvSpPr>
-        <p:spPr>
-          <a:xfrm>
-            <a:off x="6080760" y="1005840"/>
-            <a:ext cx="2651760" cy="3840480"/>
-          </a:xfrm>
-          <a:prstGeom prst="rect">
-            <a:avLst/>
-          </a:prstGeom>
-          <a:solidFill>
-            <a:srgbClr val="161B22"/>
-          </a:solidFill>
-          <a:ln w="12700">
-            <a:solidFill>
-              <a:srgbClr val="21262D"/>
-            </a:solidFill>
-            <a:prstDash val="solid"/>
-          </a:ln>
-          <a:effectLst>
-            <a:outerShdw blurRad="101600" dist="25400" dir="8100000" algn="bl" rotWithShape="0">
-              <a:srgbClr val="000000">
-                <a:alpha val="35000"/>
-              </a:srgbClr>
-            </a:outerShdw>
-          </a:effectLst>
-        </p:spPr>
-      </p:sp>
-      <p:sp>
-        <p:nvSpPr>
-          <p:cNvPr id="17" name="Shape 15"/>
-          <p:cNvSpPr/>
-          <p:nvPr/>
-        </p:nvSpPr>
-        <p:spPr>
-          <a:xfrm>
-            <a:off x="6080760" y="1005840"/>
-            <a:ext cx="2651760" cy="73152"/>
-          </a:xfrm>
-          <a:prstGeom prst="rect">
-            <a:avLst/>
-          </a:prstGeom>
-          <a:solidFill>
-            <a:srgbClr val="00C896"/>
-          </a:solidFill>
-          <a:ln w="12700">
-            <a:solidFill>
-              <a:srgbClr val="00C896"/>
-            </a:solidFill>
-            <a:prstDash val="solid"/>
-          </a:ln>
-        </p:spPr>
-      </p:sp>
-      <p:sp>
-        <p:nvSpPr>
-          <p:cNvPr id="18" name="Shape 16"/>
-          <p:cNvSpPr/>
-          <p:nvPr/>
-        </p:nvSpPr>
-        <p:spPr>
-          <a:xfrm>
-            <a:off x="6172200" y="1143000"/>
-            <a:ext cx="2468880" cy="1554480"/>
-          </a:xfrm>
-          <a:prstGeom prst="rect">
-            <a:avLst/>
-          </a:prstGeom>
-          <a:solidFill>
-            <a:srgbClr val="1C2128"/>
-          </a:solidFill>
-          <a:ln w="12700">
-            <a:solidFill>
-              <a:srgbClr val="21262D"/>
-            </a:solidFill>
-            <a:prstDash val="solid"/>
-          </a:ln>
-        </p:spPr>
-      </p:sp>
-      <p:sp>
-        <p:nvSpPr>
-          <p:cNvPr id="19" name="Text 17"/>
-          <p:cNvSpPr/>
-          <p:nvPr/>
-        </p:nvSpPr>
-        <p:spPr>
-          <a:xfrm>
-            <a:off x="6172200" y="1280160"/>
-            <a:ext cx="2468880" cy="1097280"/>
-          </a:xfrm>
-          <a:prstGeom prst="rect">
-            <a:avLst/>
-          </a:prstGeom>
-          <a:noFill/>
-          <a:ln/>
-        </p:spPr>
-        <p:txBody>
-          <a:bodyPr wrap="square" rtlCol="0" anchor="ctr"/>
-          <a:lstStyle/>
-          <a:p>
-            <a:pPr marL="0" indent="0" algn="ctr">
-              <a:buNone/>
-            </a:pPr>
-            <a:r>
-              <a:rPr lang="en-US" sz="4800" dirty="0">
-                <a:solidFill>
-                  <a:srgbClr val="000000"/>
-                </a:solidFill>
-              </a:rPr>
-              <a:t>📊</a:t>
-            </a:r>
-            <a:endParaRPr lang="en-US" sz="4800" dirty="0"/>
-          </a:p>
-        </p:txBody>
-      </p:sp>
-      <p:sp>
-        <p:nvSpPr>
-          <p:cNvPr id="20" name="Text 18"/>
-          <p:cNvSpPr/>
-          <p:nvPr/>
-        </p:nvSpPr>
-        <p:spPr>
-          <a:xfrm>
-            <a:off x="6217920" y="2834640"/>
-            <a:ext cx="2377440" cy="411480"/>
-          </a:xfrm>
-          <a:prstGeom prst="rect">
-            <a:avLst/>
-          </a:prstGeom>
-          <a:noFill/>
-          <a:ln/>
-        </p:spPr>
-        <p:txBody>
-          <a:bodyPr wrap="square" lIns="0" tIns="0" rIns="0" bIns="0" rtlCol="0" anchor="ctr"/>
-          <a:lstStyle/>
-          <a:p>
-            <a:pPr marL="0" indent="0" algn="ctr">
-              <a:buNone/>
-            </a:pPr>
-            <a:r>
-              <a:rPr lang="en-US" sz="1300" b="1" dirty="0">
-                <a:solidFill>
-                  <a:srgbClr val="FFFFFF"/>
-                </a:solidFill>
-                <a:latin typeface="Calibri" pitchFamily="34" charset="0"/>
-                <a:ea typeface="Calibri" pitchFamily="34" charset="-122"/>
-                <a:cs typeface="Calibri" pitchFamily="34" charset="-120"/>
-              </a:rPr>
-              <a:t>Phase 4: Streamlit UI</a:t>
-            </a:r>
-            <a:endParaRPr lang="en-US" sz="1300" dirty="0"/>
-          </a:p>
-        </p:txBody>
-      </p:sp>
-      <p:sp>
-        <p:nvSpPr>
-          <p:cNvPr id="21" name="Text 19"/>
-          <p:cNvSpPr/>
-          <p:nvPr/>
-        </p:nvSpPr>
-        <p:spPr>
-          <a:xfrm>
-            <a:off x="6217920" y="3291840"/>
-            <a:ext cx="2377440" cy="1280160"/>
-          </a:xfrm>
-          <a:prstGeom prst="rect">
-            <a:avLst/>
-          </a:prstGeom>
-          <a:noFill/>
-          <a:ln/>
-        </p:spPr>
-        <p:txBody>
-          <a:bodyPr wrap="square" lIns="0" tIns="0" rIns="0" bIns="0" rtlCol="0" anchor="ctr"/>
-          <a:lstStyle/>
-          <a:p>
-            <a:pPr marL="0" indent="0" algn="ctr">
-              <a:buNone/>
-            </a:pPr>
-            <a:r>
-              <a:rPr lang="en-US" sz="1100" dirty="0">
-                <a:solidFill>
-                  <a:srgbClr val="8B949E"/>
-                </a:solidFill>
-                <a:latin typeface="Calibri" pitchFamily="34" charset="0"/>
-                <a:ea typeface="Calibri" pitchFamily="34" charset="-122"/>
-                <a:cs typeface="Calibri" pitchFamily="34" charset="-120"/>
-              </a:rPr>
-              <a:t>Live frontend dashboard for immediate user-driven data queries.</a:t>
-            </a:r>
-            <a:endParaRPr lang="en-US" sz="1100" dirty="0"/>
-          </a:p>
-        </p:txBody>
-      </p:sp>
-    </p:spTree>
-  </p:cSld>
-  <p:clrMapOvr>
-    <a:masterClrMapping/>
-  </p:clrMapOvr>
-</p:sld>
-</file>
-
-<file path=ppt/slides/slide9.xml><?xml version="1.0" encoding="utf-8"?>
-<p:sld xmlns:a="http://schemas.openxmlformats.org/drawingml/2006/main" xmlns:r="http://schemas.openxmlformats.org/officeDocument/2006/relationships" xmlns:p="http://schemas.openxmlformats.org/presentationml/2006/main">
   <p:cSld>
     <p:bg>
       <p:bgPr>
@@ -6788,6 +5781,243 @@
         <p14:creationId xmlns:p14="http://schemas.microsoft.com/office/powerpoint/2010/main" val="3389144625"/>
       </p:ext>
     </p:extLst>
+  </p:cSld>
+  <p:clrMapOvr>
+    <a:masterClrMapping/>
+  </p:clrMapOvr>
+</p:sld>
+</file>
+
+<file path=ppt/slides/slide9.xml><?xml version="1.0" encoding="utf-8"?>
+<p:sld xmlns:a="http://schemas.openxmlformats.org/drawingml/2006/main" xmlns:r="http://schemas.openxmlformats.org/officeDocument/2006/relationships" xmlns:p="http://schemas.openxmlformats.org/presentationml/2006/main">
+  <p:cSld name="Slide 8">
+    <p:bg>
+      <p:bgPr>
+        <a:solidFill>
+          <a:srgbClr val="0D1117"/>
+        </a:solidFill>
+        <a:effectLst/>
+      </p:bgPr>
+    </p:bg>
+    <p:spTree>
+      <p:nvGrpSpPr>
+        <p:cNvPr id="1" name=""/>
+        <p:cNvGrpSpPr/>
+        <p:nvPr/>
+      </p:nvGrpSpPr>
+      <p:grpSpPr>
+        <a:xfrm>
+          <a:off x="0" y="0"/>
+          <a:ext cx="0" cy="0"/>
+          <a:chOff x="0" y="0"/>
+          <a:chExt cx="0" cy="0"/>
+        </a:xfrm>
+      </p:grpSpPr>
+      <p:sp>
+        <p:nvSpPr>
+          <p:cNvPr id="2" name="Shape 0"/>
+          <p:cNvSpPr/>
+          <p:nvPr/>
+        </p:nvSpPr>
+        <p:spPr>
+          <a:xfrm>
+            <a:off x="2743200" y="-1371600"/>
+            <a:ext cx="3657600" cy="3657600"/>
+          </a:xfrm>
+          <a:prstGeom prst="ellipse">
+            <a:avLst/>
+          </a:prstGeom>
+          <a:solidFill>
+            <a:srgbClr val="003D30">
+              <a:alpha val="50000"/>
+            </a:srgbClr>
+          </a:solidFill>
+          <a:ln w="12700">
+            <a:solidFill>
+              <a:srgbClr val="003D30"/>
+            </a:solidFill>
+            <a:prstDash val="solid"/>
+          </a:ln>
+        </p:spPr>
+      </p:sp>
+      <p:sp>
+        <p:nvSpPr>
+          <p:cNvPr id="3" name="Shape 1"/>
+          <p:cNvSpPr/>
+          <p:nvPr/>
+        </p:nvSpPr>
+        <p:spPr>
+          <a:xfrm>
+            <a:off x="3931920" y="1463040"/>
+            <a:ext cx="1280160" cy="54864"/>
+          </a:xfrm>
+          <a:prstGeom prst="rect">
+            <a:avLst/>
+          </a:prstGeom>
+          <a:solidFill>
+            <a:srgbClr val="00C896"/>
+          </a:solidFill>
+          <a:ln w="12700">
+            <a:solidFill>
+              <a:srgbClr val="00C896"/>
+            </a:solidFill>
+            <a:prstDash val="solid"/>
+          </a:ln>
+        </p:spPr>
+      </p:sp>
+      <p:sp>
+        <p:nvSpPr>
+          <p:cNvPr id="4" name="Text 2"/>
+          <p:cNvSpPr/>
+          <p:nvPr/>
+        </p:nvSpPr>
+        <p:spPr>
+          <a:xfrm>
+            <a:off x="914400" y="1691640"/>
+            <a:ext cx="7315200" cy="822960"/>
+          </a:xfrm>
+          <a:prstGeom prst="rect">
+            <a:avLst/>
+          </a:prstGeom>
+          <a:noFill/>
+          <a:ln/>
+        </p:spPr>
+        <p:txBody>
+          <a:bodyPr wrap="square" rtlCol="0" anchor="ctr"/>
+          <a:lstStyle/>
+          <a:p>
+            <a:pPr marL="0" indent="0" algn="ctr">
+              <a:buNone/>
+            </a:pPr>
+            <a:r>
+              <a:rPr lang="en-US" sz="4400" b="1" dirty="0">
+                <a:solidFill>
+                  <a:srgbClr val="FFFFFF"/>
+                </a:solidFill>
+                <a:latin typeface="Calibri" pitchFamily="34" charset="0"/>
+                <a:ea typeface="Calibri" pitchFamily="34" charset="-122"/>
+                <a:cs typeface="Calibri" pitchFamily="34" charset="-120"/>
+              </a:rPr>
+              <a:t>Thank You</a:t>
+            </a:r>
+          </a:p>
+        </p:txBody>
+      </p:sp>
+      <p:sp>
+        <p:nvSpPr>
+          <p:cNvPr id="5" name="Text 3"/>
+          <p:cNvSpPr/>
+          <p:nvPr/>
+        </p:nvSpPr>
+        <p:spPr>
+          <a:xfrm>
+            <a:off x="1371600" y="2651760"/>
+            <a:ext cx="6400800" cy="548640"/>
+          </a:xfrm>
+          <a:prstGeom prst="rect">
+            <a:avLst/>
+          </a:prstGeom>
+          <a:noFill/>
+          <a:ln/>
+        </p:spPr>
+        <p:txBody>
+          <a:bodyPr wrap="square" rtlCol="0" anchor="ctr"/>
+          <a:lstStyle/>
+          <a:p>
+            <a:pPr marL="0" indent="0" algn="ctr">
+              <a:buNone/>
+            </a:pPr>
+            <a:r>
+              <a:rPr lang="en-US" sz="1300">
+                <a:solidFill>
+                  <a:srgbClr val="8B949E"/>
+                </a:solidFill>
+                <a:latin typeface="Calibri" pitchFamily="34" charset="0"/>
+                <a:ea typeface="Calibri" pitchFamily="34" charset="-122"/>
+                <a:cs typeface="Calibri" pitchFamily="34" charset="-120"/>
+              </a:rPr>
+              <a:t>My </a:t>
+            </a:r>
+            <a:r>
+              <a:rPr lang="en-US" sz="1300" dirty="0">
+                <a:solidFill>
+                  <a:srgbClr val="8B949E"/>
+                </a:solidFill>
+                <a:latin typeface="Calibri" pitchFamily="34" charset="0"/>
+                <a:ea typeface="Calibri" pitchFamily="34" charset="-122"/>
+                <a:cs typeface="Calibri" pitchFamily="34" charset="-120"/>
+              </a:rPr>
+              <a:t>complete project repository, code logs, and interactive application screens are live on GitHub.</a:t>
+            </a:r>
+            <a:endParaRPr lang="en-US" sz="1300" dirty="0"/>
+          </a:p>
+        </p:txBody>
+      </p:sp>
+      <p:sp>
+        <p:nvSpPr>
+          <p:cNvPr id="6" name="Shape 4"/>
+          <p:cNvSpPr/>
+          <p:nvPr/>
+        </p:nvSpPr>
+        <p:spPr>
+          <a:xfrm>
+            <a:off x="1828800" y="3429000"/>
+            <a:ext cx="5486400" cy="640080"/>
+          </a:xfrm>
+          <a:prstGeom prst="rect">
+            <a:avLst/>
+          </a:prstGeom>
+          <a:solidFill>
+            <a:srgbClr val="161B22"/>
+          </a:solidFill>
+          <a:ln w="12700">
+            <a:solidFill>
+              <a:srgbClr val="21262D"/>
+            </a:solidFill>
+            <a:prstDash val="solid"/>
+          </a:ln>
+        </p:spPr>
+      </p:sp>
+      <p:sp>
+        <p:nvSpPr>
+          <p:cNvPr id="7" name="Text 5"/>
+          <p:cNvSpPr/>
+          <p:nvPr/>
+        </p:nvSpPr>
+        <p:spPr>
+          <a:xfrm>
+            <a:off x="1920240" y="3520440"/>
+            <a:ext cx="5303520" cy="457200"/>
+          </a:xfrm>
+          <a:prstGeom prst="rect">
+            <a:avLst/>
+          </a:prstGeom>
+          <a:noFill/>
+          <a:ln/>
+        </p:spPr>
+        <p:txBody>
+          <a:bodyPr wrap="square" rtlCol="0" anchor="ctr"/>
+          <a:lstStyle/>
+          <a:p>
+            <a:pPr marL="0" indent="0" algn="ctr">
+              <a:buNone/>
+            </a:pPr>
+            <a:r>
+              <a:rPr lang="en-US" sz="1100" dirty="0">
+                <a:solidFill>
+                  <a:srgbClr val="00B4D8"/>
+                </a:solidFill>
+                <a:latin typeface="Calibri" pitchFamily="34" charset="0"/>
+                <a:ea typeface="Calibri" pitchFamily="34" charset="-122"/>
+                <a:cs typeface="Calibri" pitchFamily="34" charset="-120"/>
+              </a:rPr>
+              <a:t>🐙  github.com/alexxksh/Big-Data-Weather-Analysis      |      PySpark | Streamlit | Tableau</a:t>
+            </a:r>
+            <a:endParaRPr lang="en-US" sz="1100" dirty="0"/>
+          </a:p>
+        </p:txBody>
+      </p:sp>
+    </p:spTree>
   </p:cSld>
   <p:clrMapOvr>
     <a:masterClrMapping/>
